--- a/docs/rag_relationship_problem.pptx
+++ b/docs/rag_relationship_problem.pptx
@@ -4565,29 +4565,7 @@
                 <a:ea typeface="Calibri" pitchFamily="34" charset="-122"/>
                 <a:cs typeface="Calibri" pitchFamily="34" charset="-120"/>
               </a:rPr>
-              <a:t>Four things </a:t>
-            </a:r>
-            <a:r>
-              <a:rPr lang="en-US" sz="2600" b="1">
-                <a:solidFill>
-                  <a:srgbClr val="018BFF"/>
-                </a:solidFill>
-                <a:latin typeface="Calibri" pitchFamily="34" charset="0"/>
-                <a:ea typeface="Calibri" pitchFamily="34" charset="-122"/>
-                <a:cs typeface="Calibri" pitchFamily="34" charset="-120"/>
-              </a:rPr>
-              <a:t>a property graph </a:t>
-            </a:r>
-            <a:r>
-              <a:rPr lang="en-US" sz="2600" b="1" dirty="0">
-                <a:solidFill>
-                  <a:srgbClr val="018BFF"/>
-                </a:solidFill>
-                <a:latin typeface="Calibri" pitchFamily="34" charset="0"/>
-                <a:ea typeface="Calibri" pitchFamily="34" charset="-122"/>
-                <a:cs typeface="Calibri" pitchFamily="34" charset="-120"/>
-              </a:rPr>
-              <a:t>does that SQL does awkwardly</a:t>
+              <a:t>Four things a graph does well that SQL does awkwardly</a:t>
             </a:r>
             <a:endParaRPr lang="en-US" sz="2600" dirty="0"/>
           </a:p>
